--- a/GUI.pptx
+++ b/GUI.pptx
@@ -105,6 +105,11 @@
       </a:defRPr>
     </a:lvl9pPr>
   </p:defaultTextStyle>
+  <p:extLst>
+    <p:ext uri="{EFAFB233-063F-42B5-8137-9DF3F51BA10A}">
+      <p15:sldGuideLst xmlns:p15="http://schemas.microsoft.com/office/powerpoint/2012/main"/>
+    </p:ext>
+  </p:extLst>
 </p:presentation>
 </file>
 
@@ -255,7 +260,7 @@
           <a:p>
             <a:fld id="{A4394901-CFBE-4FCE-9273-BAAA751755E6}" type="datetimeFigureOut">
               <a:rPr lang="de-DE" smtClean="0"/>
-              <a:t>30.01.2025</a:t>
+              <a:t>23.04.2025</a:t>
             </a:fld>
             <a:endParaRPr lang="de-DE"/>
           </a:p>
@@ -453,7 +458,7 @@
           <a:p>
             <a:fld id="{A4394901-CFBE-4FCE-9273-BAAA751755E6}" type="datetimeFigureOut">
               <a:rPr lang="de-DE" smtClean="0"/>
-              <a:t>30.01.2025</a:t>
+              <a:t>23.04.2025</a:t>
             </a:fld>
             <a:endParaRPr lang="de-DE"/>
           </a:p>
@@ -661,7 +666,7 @@
           <a:p>
             <a:fld id="{A4394901-CFBE-4FCE-9273-BAAA751755E6}" type="datetimeFigureOut">
               <a:rPr lang="de-DE" smtClean="0"/>
-              <a:t>30.01.2025</a:t>
+              <a:t>23.04.2025</a:t>
             </a:fld>
             <a:endParaRPr lang="de-DE"/>
           </a:p>
@@ -859,7 +864,7 @@
           <a:p>
             <a:fld id="{A4394901-CFBE-4FCE-9273-BAAA751755E6}" type="datetimeFigureOut">
               <a:rPr lang="de-DE" smtClean="0"/>
-              <a:t>30.01.2025</a:t>
+              <a:t>23.04.2025</a:t>
             </a:fld>
             <a:endParaRPr lang="de-DE"/>
           </a:p>
@@ -1134,7 +1139,7 @@
           <a:p>
             <a:fld id="{A4394901-CFBE-4FCE-9273-BAAA751755E6}" type="datetimeFigureOut">
               <a:rPr lang="de-DE" smtClean="0"/>
-              <a:t>30.01.2025</a:t>
+              <a:t>23.04.2025</a:t>
             </a:fld>
             <a:endParaRPr lang="de-DE"/>
           </a:p>
@@ -1399,7 +1404,7 @@
           <a:p>
             <a:fld id="{A4394901-CFBE-4FCE-9273-BAAA751755E6}" type="datetimeFigureOut">
               <a:rPr lang="de-DE" smtClean="0"/>
-              <a:t>30.01.2025</a:t>
+              <a:t>23.04.2025</a:t>
             </a:fld>
             <a:endParaRPr lang="de-DE"/>
           </a:p>
@@ -1811,7 +1816,7 @@
           <a:p>
             <a:fld id="{A4394901-CFBE-4FCE-9273-BAAA751755E6}" type="datetimeFigureOut">
               <a:rPr lang="de-DE" smtClean="0"/>
-              <a:t>30.01.2025</a:t>
+              <a:t>23.04.2025</a:t>
             </a:fld>
             <a:endParaRPr lang="de-DE"/>
           </a:p>
@@ -1952,7 +1957,7 @@
           <a:p>
             <a:fld id="{A4394901-CFBE-4FCE-9273-BAAA751755E6}" type="datetimeFigureOut">
               <a:rPr lang="de-DE" smtClean="0"/>
-              <a:t>30.01.2025</a:t>
+              <a:t>23.04.2025</a:t>
             </a:fld>
             <a:endParaRPr lang="de-DE"/>
           </a:p>
@@ -2065,7 +2070,7 @@
           <a:p>
             <a:fld id="{A4394901-CFBE-4FCE-9273-BAAA751755E6}" type="datetimeFigureOut">
               <a:rPr lang="de-DE" smtClean="0"/>
-              <a:t>30.01.2025</a:t>
+              <a:t>23.04.2025</a:t>
             </a:fld>
             <a:endParaRPr lang="de-DE"/>
           </a:p>
@@ -2376,7 +2381,7 @@
           <a:p>
             <a:fld id="{A4394901-CFBE-4FCE-9273-BAAA751755E6}" type="datetimeFigureOut">
               <a:rPr lang="de-DE" smtClean="0"/>
-              <a:t>30.01.2025</a:t>
+              <a:t>23.04.2025</a:t>
             </a:fld>
             <a:endParaRPr lang="de-DE"/>
           </a:p>
@@ -2664,7 +2669,7 @@
           <a:p>
             <a:fld id="{A4394901-CFBE-4FCE-9273-BAAA751755E6}" type="datetimeFigureOut">
               <a:rPr lang="de-DE" smtClean="0"/>
-              <a:t>30.01.2025</a:t>
+              <a:t>23.04.2025</a:t>
             </a:fld>
             <a:endParaRPr lang="de-DE"/>
           </a:p>
@@ -2905,7 +2910,7 @@
           <a:p>
             <a:fld id="{A4394901-CFBE-4FCE-9273-BAAA751755E6}" type="datetimeFigureOut">
               <a:rPr lang="de-DE" smtClean="0"/>
-              <a:t>30.01.2025</a:t>
+              <a:t>23.04.2025</a:t>
             </a:fld>
             <a:endParaRPr lang="de-DE"/>
           </a:p>
@@ -3340,17 +3345,25 @@
         </p:nvSpPr>
         <p:spPr>
           <a:xfrm>
-            <a:off x="3685310" y="304656"/>
-            <a:ext cx="4572000" cy="554326"/>
-          </a:xfrm>
-        </p:spPr>
-        <p:txBody>
-          <a:bodyPr/>
+            <a:off x="3445164" y="307270"/>
+            <a:ext cx="4572000" cy="683667"/>
+          </a:xfrm>
+        </p:spPr>
+        <p:txBody>
+          <a:bodyPr>
+            <a:normAutofit fontScale="85000" lnSpcReduction="20000"/>
+          </a:bodyPr>
           <a:lstStyle/>
           <a:p>
             <a:r>
               <a:rPr lang="de-DE" dirty="0"/>
-              <a:t>IEC Master</a:t>
+              <a:t>IEC 60870-101 </a:t>
+            </a:r>
+          </a:p>
+          <a:p>
+            <a:r>
+              <a:rPr lang="de-DE" dirty="0"/>
+              <a:t>T3000 = Master</a:t>
             </a:r>
           </a:p>
         </p:txBody>
@@ -3369,7 +3382,7 @@
         </p:nvSpPr>
         <p:spPr>
           <a:xfrm>
-            <a:off x="1948873" y="1043709"/>
+            <a:off x="2101273" y="2121495"/>
             <a:ext cx="2687782" cy="369332"/>
           </a:xfrm>
           <a:prstGeom prst="rect">
@@ -3408,7 +3421,7 @@
         </p:nvSpPr>
         <p:spPr>
           <a:xfrm>
-            <a:off x="2392218" y="1690256"/>
+            <a:off x="2544618" y="2581210"/>
             <a:ext cx="387927" cy="369332"/>
           </a:xfrm>
           <a:prstGeom prst="roundRect">
@@ -3471,7 +3484,7 @@
         </p:nvSpPr>
         <p:spPr>
           <a:xfrm>
-            <a:off x="3075709" y="1690256"/>
+            <a:off x="3228109" y="2581210"/>
             <a:ext cx="831273" cy="369332"/>
           </a:xfrm>
           <a:prstGeom prst="rect">
@@ -3506,7 +3519,7 @@
         </p:nvSpPr>
         <p:spPr>
           <a:xfrm>
-            <a:off x="2392218" y="2244315"/>
+            <a:off x="2544618" y="3135269"/>
             <a:ext cx="387927" cy="369332"/>
           </a:xfrm>
           <a:prstGeom prst="roundRect">
@@ -3566,7 +3579,7 @@
         </p:nvSpPr>
         <p:spPr>
           <a:xfrm>
-            <a:off x="3075709" y="2244315"/>
+            <a:off x="3228109" y="3135269"/>
             <a:ext cx="831273" cy="369332"/>
           </a:xfrm>
           <a:prstGeom prst="rect">
@@ -3601,7 +3614,7 @@
         </p:nvSpPr>
         <p:spPr>
           <a:xfrm>
-            <a:off x="2392218" y="2798374"/>
+            <a:off x="2544618" y="3689328"/>
             <a:ext cx="387927" cy="369332"/>
           </a:xfrm>
           <a:prstGeom prst="roundRect">
@@ -3664,7 +3677,7 @@
         </p:nvSpPr>
         <p:spPr>
           <a:xfrm>
-            <a:off x="3075709" y="2798374"/>
+            <a:off x="3228109" y="3689328"/>
             <a:ext cx="831273" cy="369332"/>
           </a:xfrm>
           <a:prstGeom prst="rect">
@@ -3699,7 +3712,7 @@
         </p:nvSpPr>
         <p:spPr>
           <a:xfrm>
-            <a:off x="2392218" y="3352433"/>
+            <a:off x="2544618" y="4243387"/>
             <a:ext cx="387927" cy="369332"/>
           </a:xfrm>
           <a:prstGeom prst="roundRect">
@@ -3759,7 +3772,7 @@
         </p:nvSpPr>
         <p:spPr>
           <a:xfrm>
-            <a:off x="3075709" y="3352433"/>
+            <a:off x="3228109" y="4243387"/>
             <a:ext cx="831273" cy="369332"/>
           </a:xfrm>
           <a:prstGeom prst="rect">
@@ -3794,7 +3807,7 @@
         </p:nvSpPr>
         <p:spPr>
           <a:xfrm>
-            <a:off x="1948873" y="4059688"/>
+            <a:off x="2101273" y="4765976"/>
             <a:ext cx="1828800" cy="369332"/>
           </a:xfrm>
           <a:prstGeom prst="rect">
@@ -3830,8 +3843,8 @@
         </p:nvSpPr>
         <p:spPr>
           <a:xfrm>
-            <a:off x="2392218" y="4521568"/>
-            <a:ext cx="387927" cy="799433"/>
+            <a:off x="2544618" y="5227857"/>
+            <a:ext cx="387927" cy="369332"/>
           </a:xfrm>
           <a:prstGeom prst="roundRect">
             <a:avLst/>
@@ -3893,7 +3906,7 @@
         </p:nvSpPr>
         <p:spPr>
           <a:xfrm>
-            <a:off x="3075709" y="4720458"/>
+            <a:off x="3238411" y="5257516"/>
             <a:ext cx="1246909" cy="369332"/>
           </a:xfrm>
           <a:prstGeom prst="rect">
@@ -3928,8 +3941,8 @@
         </p:nvSpPr>
         <p:spPr>
           <a:xfrm>
-            <a:off x="2392218" y="5568979"/>
-            <a:ext cx="387927" cy="799433"/>
+            <a:off x="2544618" y="5751691"/>
+            <a:ext cx="387927" cy="369332"/>
           </a:xfrm>
           <a:prstGeom prst="roundRect">
             <a:avLst/>
@@ -3991,7 +4004,7 @@
         </p:nvSpPr>
         <p:spPr>
           <a:xfrm>
-            <a:off x="3075709" y="5767869"/>
+            <a:off x="3238411" y="5751691"/>
             <a:ext cx="1246909" cy="369332"/>
           </a:xfrm>
           <a:prstGeom prst="rect">
@@ -4026,7 +4039,7 @@
         </p:nvSpPr>
         <p:spPr>
           <a:xfrm>
-            <a:off x="6858000" y="1039887"/>
+            <a:off x="7010399" y="2113276"/>
             <a:ext cx="1828800" cy="369332"/>
           </a:xfrm>
           <a:prstGeom prst="rect">
@@ -4061,7 +4074,7 @@
         </p:nvSpPr>
         <p:spPr>
           <a:xfrm>
-            <a:off x="7301345" y="1686434"/>
+            <a:off x="7453745" y="2577388"/>
             <a:ext cx="387927" cy="369332"/>
           </a:xfrm>
           <a:prstGeom prst="roundRect">
@@ -4124,7 +4137,7 @@
         </p:nvSpPr>
         <p:spPr>
           <a:xfrm>
-            <a:off x="7984836" y="1686434"/>
+            <a:off x="8137236" y="2577388"/>
             <a:ext cx="992909" cy="369332"/>
           </a:xfrm>
           <a:prstGeom prst="rect">
@@ -4159,7 +4172,7 @@
         </p:nvSpPr>
         <p:spPr>
           <a:xfrm>
-            <a:off x="7301345" y="2240493"/>
+            <a:off x="7453745" y="3131447"/>
             <a:ext cx="387927" cy="369332"/>
           </a:xfrm>
           <a:prstGeom prst="roundRect">
@@ -4219,7 +4232,7 @@
         </p:nvSpPr>
         <p:spPr>
           <a:xfrm>
-            <a:off x="7984836" y="2240493"/>
+            <a:off x="8137236" y="3131447"/>
             <a:ext cx="992909" cy="369332"/>
           </a:xfrm>
           <a:prstGeom prst="rect">
@@ -4254,7 +4267,7 @@
         </p:nvSpPr>
         <p:spPr>
           <a:xfrm>
-            <a:off x="7301345" y="2794552"/>
+            <a:off x="7453745" y="3685506"/>
             <a:ext cx="387927" cy="369332"/>
           </a:xfrm>
           <a:prstGeom prst="roundRect">
@@ -4317,7 +4330,7 @@
         </p:nvSpPr>
         <p:spPr>
           <a:xfrm>
-            <a:off x="7984836" y="2794552"/>
+            <a:off x="8137236" y="3685506"/>
             <a:ext cx="1186873" cy="369332"/>
           </a:xfrm>
           <a:prstGeom prst="rect">
@@ -4352,7 +4365,7 @@
         </p:nvSpPr>
         <p:spPr>
           <a:xfrm>
-            <a:off x="7301345" y="3348611"/>
+            <a:off x="7453745" y="4239565"/>
             <a:ext cx="387927" cy="369332"/>
           </a:xfrm>
           <a:prstGeom prst="roundRect">
@@ -4412,7 +4425,7 @@
         </p:nvSpPr>
         <p:spPr>
           <a:xfrm>
-            <a:off x="7984836" y="3348611"/>
+            <a:off x="8137236" y="4239565"/>
             <a:ext cx="992909" cy="369332"/>
           </a:xfrm>
           <a:prstGeom prst="rect">
@@ -4447,7 +4460,7 @@
         </p:nvSpPr>
         <p:spPr>
           <a:xfrm>
-            <a:off x="6857999" y="4059688"/>
+            <a:off x="7010399" y="4765976"/>
             <a:ext cx="2373745" cy="369332"/>
           </a:xfrm>
           <a:prstGeom prst="rect">
@@ -4490,8 +4503,8 @@
         </p:nvSpPr>
         <p:spPr>
           <a:xfrm>
-            <a:off x="7301345" y="4521568"/>
-            <a:ext cx="387927" cy="799433"/>
+            <a:off x="7453745" y="5227857"/>
+            <a:ext cx="387927" cy="369332"/>
           </a:xfrm>
           <a:prstGeom prst="roundRect">
             <a:avLst/>
@@ -4553,7 +4566,7 @@
         </p:nvSpPr>
         <p:spPr>
           <a:xfrm>
-            <a:off x="7984836" y="4720458"/>
+            <a:off x="8077200" y="5256179"/>
             <a:ext cx="1246909" cy="369332"/>
           </a:xfrm>
           <a:prstGeom prst="rect">
@@ -4588,8 +4601,8 @@
         </p:nvSpPr>
         <p:spPr>
           <a:xfrm>
-            <a:off x="7301345" y="5568979"/>
-            <a:ext cx="387927" cy="799433"/>
+            <a:off x="7453745" y="5751691"/>
+            <a:ext cx="387927" cy="369332"/>
           </a:xfrm>
           <a:prstGeom prst="roundRect">
             <a:avLst/>
@@ -4651,7 +4664,7 @@
         </p:nvSpPr>
         <p:spPr>
           <a:xfrm>
-            <a:off x="7984836" y="5767869"/>
+            <a:off x="8107217" y="5751691"/>
             <a:ext cx="1246909" cy="369332"/>
           </a:xfrm>
           <a:prstGeom prst="rect">
@@ -4668,6 +4681,75 @@
             <a:r>
               <a:rPr lang="de-DE" dirty="0"/>
               <a:t>Analog2</a:t>
+            </a:r>
+          </a:p>
+        </p:txBody>
+      </p:sp>
+      <p:sp>
+        <p:nvSpPr>
+          <p:cNvPr id="2" name="Rechteck: abgerundete Ecken 1">
+            <a:extLst>
+              <a:ext uri="{FF2B5EF4-FFF2-40B4-BE49-F238E27FC236}">
+                <a16:creationId xmlns:a16="http://schemas.microsoft.com/office/drawing/2014/main" id="{37FECF46-D332-796A-4508-CB0A3BE58DB3}"/>
+              </a:ext>
+            </a:extLst>
+          </p:cNvPr>
+          <p:cNvSpPr/>
+          <p:nvPr/>
+        </p:nvSpPr>
+        <p:spPr>
+          <a:xfrm>
+            <a:off x="4391536" y="1283065"/>
+            <a:ext cx="2302342" cy="782669"/>
+          </a:xfrm>
+          <a:prstGeom prst="roundRect">
+            <a:avLst/>
+          </a:prstGeom>
+          <a:solidFill>
+            <a:schemeClr val="accent3">
+              <a:lumMod val="60000"/>
+              <a:lumOff val="40000"/>
+            </a:schemeClr>
+          </a:solidFill>
+          <a:ln>
+            <a:solidFill>
+              <a:schemeClr val="tx1"/>
+            </a:solidFill>
+          </a:ln>
+        </p:spPr>
+        <p:style>
+          <a:lnRef idx="2">
+            <a:schemeClr val="accent1">
+              <a:shade val="15000"/>
+            </a:schemeClr>
+          </a:lnRef>
+          <a:fillRef idx="1">
+            <a:schemeClr val="accent1"/>
+          </a:fillRef>
+          <a:effectRef idx="0">
+            <a:schemeClr val="accent1"/>
+          </a:effectRef>
+          <a:fontRef idx="minor">
+            <a:schemeClr val="lt1"/>
+          </a:fontRef>
+        </p:style>
+        <p:txBody>
+          <a:bodyPr rtlCol="0" anchor="ctr"/>
+          <a:lstStyle/>
+          <a:p>
+            <a:pPr algn="ctr"/>
+            <a:r>
+              <a:rPr lang="de-DE" dirty="0">
+                <a:ln>
+                  <a:solidFill>
+                    <a:schemeClr val="tx1"/>
+                  </a:solidFill>
+                </a:ln>
+                <a:solidFill>
+                  <a:schemeClr val="tx1"/>
+                </a:solidFill>
+              </a:rPr>
+              <a:t>General Interrogation</a:t>
             </a:r>
           </a:p>
         </p:txBody>
